--- a/hernandez-law/Hernandez_Law_August 14, 2026_Proposal.pptx
+++ b/hernandez-law/Hernandez_Law_August 14, 2026_Proposal.pptx
@@ -1,6 +1,6 @@
 
 <file path=ppt/presentation.xml><?xml version="1.0" encoding="utf-8"?>
-<p:presentation xmlns:a="http://schemas.openxmlformats.org/drawingml/2006/main" xmlns:r="http://schemas.openxmlformats.org/officeDocument/2006/relationships" xmlns:p="http://schemas.openxmlformats.org/presentationml/2006/main" saveSubsetFonts="1" autoCompressPictures="0">
+<p:presentation xmlns:a="http://schemas.openxmlformats.org/drawingml/2006/main" xmlns:r="http://schemas.openxmlformats.org/officeDocument/2006/relationships" xmlns:p="http://schemas.openxmlformats.org/presentationml/2006/main" saveSubsetFonts="1" autoCompressPictures="0" embedTrueTypeFonts="1">
   <p:sldMasterIdLst>
     <p:sldMasterId id="2147483648" r:id="rId1"/>
   </p:sldMasterIdLst>
@@ -11,6 +11,14 @@
   </p:sldIdLst>
   <p:sldSz cx="9144000" cy="5143500" type="screen4x3"/>
   <p:notesSz cx="6858000" cy="9144000"/>
+  <p:embeddedFontLst>
+    <p:embeddedFont>
+      <p:font typeface="Poppins"/>
+      <p:regular r:id="rIdEmbedFont1"/>
+      <p:bold r:id="rIdEmbedFont2"/>
+      <p:italic r:id="rIdEmbedFont3"/>
+    </p:embeddedFont>
+  </p:embeddedFontLst>
   <p:defaultTextStyle>
     <a:defPPr>
       <a:defRPr lang="en-US"/>
@@ -3152,7 +3160,9 @@
           <a:noFill/>
         </p:spPr>
         <p:txBody>
-          <a:bodyPr wrap="square"/>
+          <a:bodyPr wrap="square">
+            <a:normAutofit/>
+          </a:bodyPr>
           <a:lstStyle/>
           <a:p>
             <a:pPr algn="l"/>
@@ -3185,7 +3195,9 @@
           <a:noFill/>
         </p:spPr>
         <p:txBody>
-          <a:bodyPr wrap="square"/>
+          <a:bodyPr wrap="square">
+            <a:normAutofit/>
+          </a:bodyPr>
           <a:lstStyle/>
           <a:p>
             <a:pPr algn="l"/>
@@ -3308,7 +3320,9 @@
           <a:noFill/>
         </p:spPr>
         <p:txBody>
-          <a:bodyPr wrap="square"/>
+          <a:bodyPr wrap="square">
+            <a:normAutofit/>
+          </a:bodyPr>
           <a:lstStyle/>
           <a:p>
             <a:pPr algn="ctr"/>
@@ -3341,7 +3355,9 @@
           <a:noFill/>
         </p:spPr>
         <p:txBody>
-          <a:bodyPr wrap="square"/>
+          <a:bodyPr wrap="square">
+            <a:normAutofit/>
+          </a:bodyPr>
           <a:lstStyle/>
           <a:p>
             <a:pPr algn="ctr"/>
@@ -3464,7 +3480,9 @@
           <a:noFill/>
         </p:spPr>
         <p:txBody>
-          <a:bodyPr wrap="square"/>
+          <a:bodyPr wrap="square">
+            <a:normAutofit/>
+          </a:bodyPr>
           <a:lstStyle/>
           <a:p>
             <a:pPr algn="l"/>
@@ -3497,7 +3515,9 @@
           <a:noFill/>
         </p:spPr>
         <p:txBody>
-          <a:bodyPr wrap="square"/>
+          <a:bodyPr wrap="square">
+            <a:normAutofit/>
+          </a:bodyPr>
           <a:lstStyle/>
           <a:p>
             <a:pPr algn="l"/>
@@ -3530,7 +3550,9 @@
           <a:noFill/>
         </p:spPr>
         <p:txBody>
-          <a:bodyPr wrap="square"/>
+          <a:bodyPr wrap="square">
+            <a:normAutofit/>
+          </a:bodyPr>
           <a:lstStyle/>
           <a:p>
             <a:pPr algn="l"/>
@@ -3653,7 +3675,9 @@
           <a:noFill/>
         </p:spPr>
         <p:txBody>
-          <a:bodyPr wrap="square"/>
+          <a:bodyPr wrap="square">
+            <a:normAutofit/>
+          </a:bodyPr>
           <a:lstStyle/>
           <a:p>
             <a:pPr algn="l"/>
@@ -3686,7 +3710,9 @@
           <a:noFill/>
         </p:spPr>
         <p:txBody>
-          <a:bodyPr wrap="square"/>
+          <a:bodyPr wrap="square">
+            <a:normAutofit/>
+          </a:bodyPr>
           <a:lstStyle/>
           <a:p>
             <a:pPr algn="l"/>
@@ -3719,7 +3745,9 @@
           <a:noFill/>
         </p:spPr>
         <p:txBody>
-          <a:bodyPr wrap="square"/>
+          <a:bodyPr wrap="square">
+            <a:normAutofit/>
+          </a:bodyPr>
           <a:lstStyle/>
           <a:p>
             <a:pPr algn="l"/>
@@ -3842,7 +3870,9 @@
           <a:noFill/>
         </p:spPr>
         <p:txBody>
-          <a:bodyPr wrap="square"/>
+          <a:bodyPr wrap="square">
+            <a:normAutofit/>
+          </a:bodyPr>
           <a:lstStyle/>
           <a:p>
             <a:pPr algn="l"/>
@@ -3875,7 +3905,9 @@
           <a:noFill/>
         </p:spPr>
         <p:txBody>
-          <a:bodyPr wrap="square"/>
+          <a:bodyPr wrap="square">
+            <a:normAutofit/>
+          </a:bodyPr>
           <a:lstStyle/>
           <a:p>
             <a:pPr algn="l"/>
@@ -3908,7 +3940,9 @@
           <a:noFill/>
         </p:spPr>
         <p:txBody>
-          <a:bodyPr wrap="square"/>
+          <a:bodyPr wrap="square">
+            <a:normAutofit/>
+          </a:bodyPr>
           <a:lstStyle/>
           <a:p>
             <a:pPr algn="l"/>
@@ -4031,7 +4065,9 @@
           <a:noFill/>
         </p:spPr>
         <p:txBody>
-          <a:bodyPr wrap="square"/>
+          <a:bodyPr wrap="square">
+            <a:normAutofit/>
+          </a:bodyPr>
           <a:lstStyle/>
           <a:p>
             <a:pPr algn="l"/>
@@ -4064,7 +4100,9 @@
           <a:noFill/>
         </p:spPr>
         <p:txBody>
-          <a:bodyPr wrap="square"/>
+          <a:bodyPr wrap="square">
+            <a:normAutofit/>
+          </a:bodyPr>
           <a:lstStyle/>
           <a:p>
             <a:pPr algn="l"/>
@@ -4097,7 +4135,9 @@
           <a:noFill/>
         </p:spPr>
         <p:txBody>
-          <a:bodyPr wrap="square"/>
+          <a:bodyPr wrap="square">
+            <a:normAutofit/>
+          </a:bodyPr>
           <a:lstStyle/>
           <a:p>
             <a:pPr algn="l"/>
@@ -4130,7 +4170,9 @@
           <a:noFill/>
         </p:spPr>
         <p:txBody>
-          <a:bodyPr wrap="square"/>
+          <a:bodyPr wrap="square">
+            <a:normAutofit/>
+          </a:bodyPr>
           <a:lstStyle/>
           <a:p>
             <a:pPr algn="l"/>
@@ -4253,7 +4295,9 @@
           <a:noFill/>
         </p:spPr>
         <p:txBody>
-          <a:bodyPr wrap="square"/>
+          <a:bodyPr wrap="square">
+            <a:normAutofit/>
+          </a:bodyPr>
           <a:lstStyle/>
           <a:p>
             <a:pPr algn="ctr"/>
@@ -4278,7 +4322,7 @@
         <p:spPr>
           <a:xfrm>
             <a:off x="676656" y="2286000"/>
-            <a:ext cx="4352544" cy="420624"/>
+            <a:ext cx="4352544" cy="475488"/>
           </a:xfrm>
           <a:prstGeom prst="rect">
             <a:avLst/>
@@ -4286,7 +4330,9 @@
           <a:noFill/>
         </p:spPr>
         <p:txBody>
-          <a:bodyPr wrap="square"/>
+          <a:bodyPr wrap="square">
+            <a:normAutofit/>
+          </a:bodyPr>
           <a:lstStyle/>
           <a:p>
             <a:pPr algn="l"/>
@@ -4409,7 +4455,9 @@
           <a:noFill/>
         </p:spPr>
         <p:txBody>
-          <a:bodyPr wrap="square"/>
+          <a:bodyPr wrap="square">
+            <a:normAutofit/>
+          </a:bodyPr>
           <a:lstStyle/>
           <a:p>
             <a:pPr algn="ctr"/>
@@ -4434,7 +4482,7 @@
         <p:spPr>
           <a:xfrm>
             <a:off x="676656" y="2907792"/>
-            <a:ext cx="4352544" cy="420624"/>
+            <a:ext cx="4352544" cy="475488"/>
           </a:xfrm>
           <a:prstGeom prst="rect">
             <a:avLst/>
@@ -4442,7 +4490,9 @@
           <a:noFill/>
         </p:spPr>
         <p:txBody>
-          <a:bodyPr wrap="square"/>
+          <a:bodyPr wrap="square">
+            <a:normAutofit/>
+          </a:bodyPr>
           <a:lstStyle/>
           <a:p>
             <a:pPr algn="l"/>
@@ -4565,7 +4615,9 @@
           <a:noFill/>
         </p:spPr>
         <p:txBody>
-          <a:bodyPr wrap="square"/>
+          <a:bodyPr wrap="square">
+            <a:normAutofit/>
+          </a:bodyPr>
           <a:lstStyle/>
           <a:p>
             <a:pPr algn="ctr"/>
@@ -4590,7 +4642,7 @@
         <p:spPr>
           <a:xfrm>
             <a:off x="676656" y="3529584"/>
-            <a:ext cx="4352544" cy="420624"/>
+            <a:ext cx="4352544" cy="475488"/>
           </a:xfrm>
           <a:prstGeom prst="rect">
             <a:avLst/>
@@ -4598,7 +4650,9 @@
           <a:noFill/>
         </p:spPr>
         <p:txBody>
-          <a:bodyPr wrap="square"/>
+          <a:bodyPr wrap="square">
+            <a:normAutofit/>
+          </a:bodyPr>
           <a:lstStyle/>
           <a:p>
             <a:pPr algn="l"/>
@@ -4721,7 +4775,9 @@
           <a:noFill/>
         </p:spPr>
         <p:txBody>
-          <a:bodyPr wrap="square"/>
+          <a:bodyPr wrap="square">
+            <a:normAutofit/>
+          </a:bodyPr>
           <a:lstStyle/>
           <a:p>
             <a:pPr algn="ctr"/>
@@ -4746,7 +4802,7 @@
         <p:spPr>
           <a:xfrm>
             <a:off x="676656" y="4151376"/>
-            <a:ext cx="4352544" cy="420624"/>
+            <a:ext cx="4352544" cy="475488"/>
           </a:xfrm>
           <a:prstGeom prst="rect">
             <a:avLst/>
@@ -4754,7 +4810,9 @@
           <a:noFill/>
         </p:spPr>
         <p:txBody>
-          <a:bodyPr wrap="square"/>
+          <a:bodyPr wrap="square">
+            <a:normAutofit/>
+          </a:bodyPr>
           <a:lstStyle/>
           <a:p>
             <a:pPr algn="l"/>
@@ -4922,7 +4980,9 @@
           <a:noFill/>
         </p:spPr>
         <p:txBody>
-          <a:bodyPr wrap="square"/>
+          <a:bodyPr wrap="square">
+            <a:normAutofit/>
+          </a:bodyPr>
           <a:lstStyle/>
           <a:p>
             <a:pPr algn="l"/>
@@ -4955,7 +5015,9 @@
           <a:noFill/>
         </p:spPr>
         <p:txBody>
-          <a:bodyPr wrap="square"/>
+          <a:bodyPr wrap="square">
+            <a:normAutofit/>
+          </a:bodyPr>
           <a:lstStyle/>
           <a:p>
             <a:pPr algn="l"/>
@@ -4988,7 +5050,9 @@
           <a:noFill/>
         </p:spPr>
         <p:txBody>
-          <a:bodyPr wrap="square"/>
+          <a:bodyPr wrap="square">
+            <a:normAutofit/>
+          </a:bodyPr>
           <a:lstStyle/>
           <a:p>
             <a:pPr algn="l"/>
@@ -5058,7 +5122,7 @@
         <p:spPr>
           <a:xfrm>
             <a:off x="5413248" y="2221991"/>
-            <a:ext cx="1828800" cy="219456"/>
+            <a:ext cx="1828800" cy="256032"/>
           </a:xfrm>
           <a:prstGeom prst="rect">
             <a:avLst/>
@@ -5066,7 +5130,9 @@
           <a:noFill/>
         </p:spPr>
         <p:txBody>
-          <a:bodyPr wrap="square"/>
+          <a:bodyPr wrap="square">
+            <a:normAutofit/>
+          </a:bodyPr>
           <a:lstStyle/>
           <a:p>
             <a:pPr algn="l"/>
@@ -5091,7 +5157,7 @@
         <p:spPr>
           <a:xfrm>
             <a:off x="7260336" y="2221991"/>
-            <a:ext cx="914400" cy="219456"/>
+            <a:ext cx="914400" cy="256032"/>
           </a:xfrm>
           <a:prstGeom prst="rect">
             <a:avLst/>
@@ -5099,7 +5165,9 @@
           <a:noFill/>
         </p:spPr>
         <p:txBody>
-          <a:bodyPr wrap="square"/>
+          <a:bodyPr wrap="square">
+            <a:normAutofit/>
+          </a:bodyPr>
           <a:lstStyle/>
           <a:p>
             <a:pPr algn="l"/>
@@ -5124,7 +5192,7 @@
         <p:spPr>
           <a:xfrm>
             <a:off x="8193024" y="2240279"/>
-            <a:ext cx="822960" cy="201168"/>
+            <a:ext cx="822960" cy="237744"/>
           </a:xfrm>
           <a:prstGeom prst="rect">
             <a:avLst/>
@@ -5132,7 +5200,9 @@
           <a:noFill/>
         </p:spPr>
         <p:txBody>
-          <a:bodyPr wrap="square"/>
+          <a:bodyPr wrap="square">
+            <a:normAutofit/>
+          </a:bodyPr>
           <a:lstStyle/>
           <a:p>
             <a:pPr algn="l"/>
@@ -5202,7 +5272,7 @@
         <p:spPr>
           <a:xfrm>
             <a:off x="5413248" y="2569463"/>
-            <a:ext cx="1828800" cy="219456"/>
+            <a:ext cx="1828800" cy="256032"/>
           </a:xfrm>
           <a:prstGeom prst="rect">
             <a:avLst/>
@@ -5210,7 +5280,9 @@
           <a:noFill/>
         </p:spPr>
         <p:txBody>
-          <a:bodyPr wrap="square"/>
+          <a:bodyPr wrap="square">
+            <a:normAutofit/>
+          </a:bodyPr>
           <a:lstStyle/>
           <a:p>
             <a:pPr algn="l"/>
@@ -5235,7 +5307,7 @@
         <p:spPr>
           <a:xfrm>
             <a:off x="7260336" y="2569463"/>
-            <a:ext cx="914400" cy="219456"/>
+            <a:ext cx="914400" cy="256032"/>
           </a:xfrm>
           <a:prstGeom prst="rect">
             <a:avLst/>
@@ -5243,7 +5315,9 @@
           <a:noFill/>
         </p:spPr>
         <p:txBody>
-          <a:bodyPr wrap="square"/>
+          <a:bodyPr wrap="square">
+            <a:normAutofit/>
+          </a:bodyPr>
           <a:lstStyle/>
           <a:p>
             <a:pPr algn="l"/>
@@ -5268,7 +5342,7 @@
         <p:spPr>
           <a:xfrm>
             <a:off x="8193024" y="2587751"/>
-            <a:ext cx="822960" cy="201168"/>
+            <a:ext cx="822960" cy="237744"/>
           </a:xfrm>
           <a:prstGeom prst="rect">
             <a:avLst/>
@@ -5276,7 +5350,9 @@
           <a:noFill/>
         </p:spPr>
         <p:txBody>
-          <a:bodyPr wrap="square"/>
+          <a:bodyPr wrap="square">
+            <a:normAutofit/>
+          </a:bodyPr>
           <a:lstStyle/>
           <a:p>
             <a:pPr algn="l"/>
@@ -5346,7 +5422,7 @@
         <p:spPr>
           <a:xfrm>
             <a:off x="5413248" y="2916936"/>
-            <a:ext cx="1828800" cy="219456"/>
+            <a:ext cx="1828800" cy="256032"/>
           </a:xfrm>
           <a:prstGeom prst="rect">
             <a:avLst/>
@@ -5354,7 +5430,9 @@
           <a:noFill/>
         </p:spPr>
         <p:txBody>
-          <a:bodyPr wrap="square"/>
+          <a:bodyPr wrap="square">
+            <a:normAutofit/>
+          </a:bodyPr>
           <a:lstStyle/>
           <a:p>
             <a:pPr algn="l"/>
@@ -5379,7 +5457,7 @@
         <p:spPr>
           <a:xfrm>
             <a:off x="7260336" y="2916936"/>
-            <a:ext cx="914400" cy="219456"/>
+            <a:ext cx="914400" cy="256032"/>
           </a:xfrm>
           <a:prstGeom prst="rect">
             <a:avLst/>
@@ -5387,7 +5465,9 @@
           <a:noFill/>
         </p:spPr>
         <p:txBody>
-          <a:bodyPr wrap="square"/>
+          <a:bodyPr wrap="square">
+            <a:normAutofit/>
+          </a:bodyPr>
           <a:lstStyle/>
           <a:p>
             <a:pPr algn="l"/>
@@ -5412,7 +5492,7 @@
         <p:spPr>
           <a:xfrm>
             <a:off x="8193024" y="2935224"/>
-            <a:ext cx="822960" cy="201168"/>
+            <a:ext cx="822960" cy="237744"/>
           </a:xfrm>
           <a:prstGeom prst="rect">
             <a:avLst/>
@@ -5420,7 +5500,9 @@
           <a:noFill/>
         </p:spPr>
         <p:txBody>
-          <a:bodyPr wrap="square"/>
+          <a:bodyPr wrap="square">
+            <a:normAutofit/>
+          </a:bodyPr>
           <a:lstStyle/>
           <a:p>
             <a:pPr algn="l"/>
@@ -5535,7 +5617,7 @@
         <p:spPr>
           <a:xfrm>
             <a:off x="5413248" y="3264408"/>
-            <a:ext cx="1828800" cy="219456"/>
+            <a:ext cx="1828800" cy="256032"/>
           </a:xfrm>
           <a:prstGeom prst="rect">
             <a:avLst/>
@@ -5543,7 +5625,9 @@
           <a:noFill/>
         </p:spPr>
         <p:txBody>
-          <a:bodyPr wrap="square"/>
+          <a:bodyPr wrap="square">
+            <a:normAutofit/>
+          </a:bodyPr>
           <a:lstStyle/>
           <a:p>
             <a:pPr algn="l"/>
@@ -5568,7 +5652,7 @@
         <p:spPr>
           <a:xfrm>
             <a:off x="7260336" y="3264408"/>
-            <a:ext cx="914400" cy="219456"/>
+            <a:ext cx="914400" cy="256032"/>
           </a:xfrm>
           <a:prstGeom prst="rect">
             <a:avLst/>
@@ -5576,7 +5660,9 @@
           <a:noFill/>
         </p:spPr>
         <p:txBody>
-          <a:bodyPr wrap="square"/>
+          <a:bodyPr wrap="square">
+            <a:normAutofit/>
+          </a:bodyPr>
           <a:lstStyle/>
           <a:p>
             <a:pPr algn="l"/>
@@ -5601,7 +5687,7 @@
         <p:spPr>
           <a:xfrm>
             <a:off x="8193024" y="3282696"/>
-            <a:ext cx="822960" cy="201168"/>
+            <a:ext cx="822960" cy="237744"/>
           </a:xfrm>
           <a:prstGeom prst="rect">
             <a:avLst/>
@@ -5609,7 +5695,9 @@
           <a:noFill/>
         </p:spPr>
         <p:txBody>
-          <a:bodyPr wrap="square"/>
+          <a:bodyPr wrap="square">
+            <a:normAutofit/>
+          </a:bodyPr>
           <a:lstStyle/>
           <a:p>
             <a:pPr algn="l"/>
@@ -5711,7 +5799,9 @@
           <a:noFill/>
         </p:spPr>
         <p:txBody>
-          <a:bodyPr wrap="square"/>
+          <a:bodyPr wrap="square">
+            <a:normAutofit/>
+          </a:bodyPr>
           <a:lstStyle/>
           <a:p>
             <a:pPr algn="l"/>
@@ -5744,7 +5834,9 @@
           <a:noFill/>
         </p:spPr>
         <p:txBody>
-          <a:bodyPr wrap="square"/>
+          <a:bodyPr wrap="square">
+            <a:normAutofit/>
+          </a:bodyPr>
           <a:lstStyle/>
           <a:p>
             <a:pPr algn="r"/>
@@ -5840,7 +5932,9 @@
           <a:noFill/>
         </p:spPr>
         <p:txBody>
-          <a:bodyPr wrap="square"/>
+          <a:bodyPr wrap="square">
+            <a:normAutofit/>
+          </a:bodyPr>
           <a:lstStyle/>
           <a:p>
             <a:pPr algn="l"/>
@@ -5873,7 +5967,9 @@
           <a:noFill/>
         </p:spPr>
         <p:txBody>
-          <a:bodyPr wrap="square"/>
+          <a:bodyPr wrap="square">
+            <a:normAutofit/>
+          </a:bodyPr>
           <a:lstStyle/>
           <a:p>
             <a:pPr algn="l"/>
@@ -5996,7 +6092,9 @@
           <a:noFill/>
         </p:spPr>
         <p:txBody>
-          <a:bodyPr wrap="square"/>
+          <a:bodyPr wrap="square">
+            <a:normAutofit/>
+          </a:bodyPr>
           <a:lstStyle/>
           <a:p>
             <a:pPr algn="l"/>
@@ -6029,7 +6127,9 @@
           <a:noFill/>
         </p:spPr>
         <p:txBody>
-          <a:bodyPr wrap="square"/>
+          <a:bodyPr wrap="square">
+            <a:normAutofit/>
+          </a:bodyPr>
           <a:lstStyle/>
           <a:p>
             <a:pPr algn="l"/>
@@ -6107,7 +6207,9 @@
           <a:noFill/>
         </p:spPr>
         <p:txBody>
-          <a:bodyPr wrap="square"/>
+          <a:bodyPr wrap="square">
+            <a:normAutofit/>
+          </a:bodyPr>
           <a:lstStyle/>
           <a:p>
             <a:pPr algn="l"/>
@@ -6140,7 +6242,9 @@
           <a:noFill/>
         </p:spPr>
         <p:txBody>
-          <a:bodyPr wrap="square"/>
+          <a:bodyPr wrap="square">
+            <a:normAutofit/>
+          </a:bodyPr>
           <a:lstStyle/>
           <a:p>
             <a:pPr algn="l"/>
@@ -6218,7 +6322,9 @@
           <a:noFill/>
         </p:spPr>
         <p:txBody>
-          <a:bodyPr wrap="square"/>
+          <a:bodyPr wrap="square">
+            <a:normAutofit/>
+          </a:bodyPr>
           <a:lstStyle/>
           <a:p>
             <a:pPr algn="l"/>
@@ -6251,7 +6357,9 @@
           <a:noFill/>
         </p:spPr>
         <p:txBody>
-          <a:bodyPr wrap="square"/>
+          <a:bodyPr wrap="square">
+            <a:normAutofit/>
+          </a:bodyPr>
           <a:lstStyle/>
           <a:p>
             <a:pPr algn="l"/>
@@ -6284,7 +6392,9 @@
           <a:noFill/>
         </p:spPr>
         <p:txBody>
-          <a:bodyPr wrap="square"/>
+          <a:bodyPr wrap="square">
+            <a:normAutofit/>
+          </a:bodyPr>
           <a:lstStyle/>
           <a:p>
             <a:pPr algn="l"/>
@@ -6407,7 +6517,9 @@
           <a:noFill/>
         </p:spPr>
         <p:txBody>
-          <a:bodyPr wrap="square"/>
+          <a:bodyPr wrap="square">
+            <a:normAutofit/>
+          </a:bodyPr>
           <a:lstStyle/>
           <a:p>
             <a:pPr algn="l"/>
@@ -6530,7 +6642,9 @@
           <a:noFill/>
         </p:spPr>
         <p:txBody>
-          <a:bodyPr wrap="square"/>
+          <a:bodyPr wrap="square">
+            <a:normAutofit/>
+          </a:bodyPr>
           <a:lstStyle/>
           <a:p>
             <a:pPr algn="l"/>
@@ -6653,7 +6767,9 @@
           <a:noFill/>
         </p:spPr>
         <p:txBody>
-          <a:bodyPr wrap="square"/>
+          <a:bodyPr wrap="square">
+            <a:normAutofit/>
+          </a:bodyPr>
           <a:lstStyle/>
           <a:p>
             <a:pPr algn="l"/>
@@ -6776,7 +6892,9 @@
           <a:noFill/>
         </p:spPr>
         <p:txBody>
-          <a:bodyPr wrap="square"/>
+          <a:bodyPr wrap="square">
+            <a:normAutofit/>
+          </a:bodyPr>
           <a:lstStyle/>
           <a:p>
             <a:pPr algn="l"/>
@@ -6899,7 +7017,9 @@
           <a:noFill/>
         </p:spPr>
         <p:txBody>
-          <a:bodyPr wrap="square"/>
+          <a:bodyPr wrap="square">
+            <a:normAutofit/>
+          </a:bodyPr>
           <a:lstStyle/>
           <a:p>
             <a:pPr algn="l"/>
@@ -6977,7 +7097,9 @@
           <a:noFill/>
         </p:spPr>
         <p:txBody>
-          <a:bodyPr wrap="square"/>
+          <a:bodyPr wrap="square">
+            <a:normAutofit/>
+          </a:bodyPr>
           <a:lstStyle/>
           <a:p>
             <a:pPr algn="l"/>
@@ -7010,7 +7132,9 @@
           <a:noFill/>
         </p:spPr>
         <p:txBody>
-          <a:bodyPr wrap="square"/>
+          <a:bodyPr wrap="square">
+            <a:normAutofit/>
+          </a:bodyPr>
           <a:lstStyle/>
           <a:p>
             <a:pPr algn="l"/>
@@ -7043,7 +7167,9 @@
           <a:noFill/>
         </p:spPr>
         <p:txBody>
-          <a:bodyPr wrap="square"/>
+          <a:bodyPr wrap="square">
+            <a:normAutofit/>
+          </a:bodyPr>
           <a:lstStyle/>
           <a:p>
             <a:pPr algn="l"/>
@@ -7166,7 +7292,9 @@
           <a:noFill/>
         </p:spPr>
         <p:txBody>
-          <a:bodyPr wrap="square"/>
+          <a:bodyPr wrap="square">
+            <a:normAutofit/>
+          </a:bodyPr>
           <a:lstStyle/>
           <a:p>
             <a:pPr algn="l"/>
@@ -7289,7 +7417,9 @@
           <a:noFill/>
         </p:spPr>
         <p:txBody>
-          <a:bodyPr wrap="square"/>
+          <a:bodyPr wrap="square">
+            <a:normAutofit/>
+          </a:bodyPr>
           <a:lstStyle/>
           <a:p>
             <a:pPr algn="l"/>
@@ -7412,7 +7542,9 @@
           <a:noFill/>
         </p:spPr>
         <p:txBody>
-          <a:bodyPr wrap="square"/>
+          <a:bodyPr wrap="square">
+            <a:normAutofit/>
+          </a:bodyPr>
           <a:lstStyle/>
           <a:p>
             <a:pPr algn="l"/>
@@ -7535,7 +7667,9 @@
           <a:noFill/>
         </p:spPr>
         <p:txBody>
-          <a:bodyPr wrap="square"/>
+          <a:bodyPr wrap="square">
+            <a:normAutofit/>
+          </a:bodyPr>
           <a:lstStyle/>
           <a:p>
             <a:pPr algn="l"/>
@@ -7658,7 +7792,9 @@
           <a:noFill/>
         </p:spPr>
         <p:txBody>
-          <a:bodyPr wrap="square"/>
+          <a:bodyPr wrap="square">
+            <a:normAutofit/>
+          </a:bodyPr>
           <a:lstStyle/>
           <a:p>
             <a:pPr algn="l"/>
@@ -7736,7 +7872,9 @@
           <a:noFill/>
         </p:spPr>
         <p:txBody>
-          <a:bodyPr wrap="square"/>
+          <a:bodyPr wrap="square">
+            <a:normAutofit/>
+          </a:bodyPr>
           <a:lstStyle/>
           <a:p>
             <a:pPr algn="l"/>
@@ -7769,7 +7907,9 @@
           <a:noFill/>
         </p:spPr>
         <p:txBody>
-          <a:bodyPr wrap="square"/>
+          <a:bodyPr wrap="square">
+            <a:normAutofit/>
+          </a:bodyPr>
           <a:lstStyle/>
           <a:p>
             <a:pPr algn="l"/>
@@ -7802,7 +7942,9 @@
           <a:noFill/>
         </p:spPr>
         <p:txBody>
-          <a:bodyPr wrap="square"/>
+          <a:bodyPr wrap="square">
+            <a:normAutofit/>
+          </a:bodyPr>
           <a:lstStyle/>
           <a:p>
             <a:pPr algn="l"/>
@@ -7925,7 +8067,9 @@
           <a:noFill/>
         </p:spPr>
         <p:txBody>
-          <a:bodyPr wrap="square"/>
+          <a:bodyPr wrap="square">
+            <a:normAutofit/>
+          </a:bodyPr>
           <a:lstStyle/>
           <a:p>
             <a:pPr algn="l"/>
@@ -8048,7 +8192,9 @@
           <a:noFill/>
         </p:spPr>
         <p:txBody>
-          <a:bodyPr wrap="square"/>
+          <a:bodyPr wrap="square">
+            <a:normAutofit/>
+          </a:bodyPr>
           <a:lstStyle/>
           <a:p>
             <a:pPr algn="l"/>
@@ -8171,7 +8317,9 @@
           <a:noFill/>
         </p:spPr>
         <p:txBody>
-          <a:bodyPr wrap="square"/>
+          <a:bodyPr wrap="square">
+            <a:normAutofit/>
+          </a:bodyPr>
           <a:lstStyle/>
           <a:p>
             <a:pPr algn="l"/>
@@ -8294,7 +8442,9 @@
           <a:noFill/>
         </p:spPr>
         <p:txBody>
-          <a:bodyPr wrap="square"/>
+          <a:bodyPr wrap="square">
+            <a:normAutofit/>
+          </a:bodyPr>
           <a:lstStyle/>
           <a:p>
             <a:pPr algn="l"/>
@@ -8417,7 +8567,9 @@
           <a:noFill/>
         </p:spPr>
         <p:txBody>
-          <a:bodyPr wrap="square"/>
+          <a:bodyPr wrap="square">
+            <a:normAutofit/>
+          </a:bodyPr>
           <a:lstStyle/>
           <a:p>
             <a:pPr algn="l"/>
@@ -8519,7 +8671,9 @@
           <a:noFill/>
         </p:spPr>
         <p:txBody>
-          <a:bodyPr wrap="square"/>
+          <a:bodyPr wrap="square">
+            <a:normAutofit/>
+          </a:bodyPr>
           <a:lstStyle/>
           <a:p>
             <a:pPr algn="l"/>
@@ -8552,7 +8706,9 @@
           <a:noFill/>
         </p:spPr>
         <p:txBody>
-          <a:bodyPr wrap="square"/>
+          <a:bodyPr wrap="square">
+            <a:normAutofit/>
+          </a:bodyPr>
           <a:lstStyle/>
           <a:p>
             <a:pPr algn="r"/>
@@ -8648,7 +8804,9 @@
           <a:noFill/>
         </p:spPr>
         <p:txBody>
-          <a:bodyPr wrap="square"/>
+          <a:bodyPr wrap="square">
+            <a:normAutofit/>
+          </a:bodyPr>
           <a:lstStyle/>
           <a:p>
             <a:pPr algn="l"/>
@@ -8681,7 +8839,9 @@
           <a:noFill/>
         </p:spPr>
         <p:txBody>
-          <a:bodyPr wrap="square"/>
+          <a:bodyPr wrap="square">
+            <a:normAutofit/>
+          </a:bodyPr>
           <a:lstStyle/>
           <a:p>
             <a:pPr algn="l"/>
@@ -8804,7 +8964,9 @@
           <a:noFill/>
         </p:spPr>
         <p:txBody>
-          <a:bodyPr wrap="square"/>
+          <a:bodyPr wrap="square">
+            <a:normAutofit/>
+          </a:bodyPr>
           <a:lstStyle/>
           <a:p>
             <a:pPr algn="l"/>
@@ -8837,7 +8999,9 @@
           <a:noFill/>
         </p:spPr>
         <p:txBody>
-          <a:bodyPr wrap="square"/>
+          <a:bodyPr wrap="square">
+            <a:normAutofit/>
+          </a:bodyPr>
           <a:lstStyle/>
           <a:p>
             <a:pPr algn="l"/>
@@ -8870,7 +9034,9 @@
           <a:noFill/>
         </p:spPr>
         <p:txBody>
-          <a:bodyPr wrap="square"/>
+          <a:bodyPr wrap="square">
+            <a:normAutofit/>
+          </a:bodyPr>
           <a:lstStyle/>
           <a:p>
             <a:pPr algn="l"/>
@@ -8903,7 +9069,9 @@
           <a:noFill/>
         </p:spPr>
         <p:txBody>
-          <a:bodyPr wrap="square"/>
+          <a:bodyPr wrap="square">
+            <a:normAutofit/>
+          </a:bodyPr>
           <a:lstStyle/>
           <a:p>
             <a:pPr algn="l"/>
@@ -8981,7 +9149,9 @@
           <a:noFill/>
         </p:spPr>
         <p:txBody>
-          <a:bodyPr wrap="square"/>
+          <a:bodyPr wrap="square">
+            <a:normAutofit/>
+          </a:bodyPr>
           <a:lstStyle/>
           <a:p>
             <a:pPr algn="l"/>
@@ -9059,7 +9229,9 @@
           <a:noFill/>
         </p:spPr>
         <p:txBody>
-          <a:bodyPr wrap="square"/>
+          <a:bodyPr wrap="square">
+            <a:normAutofit/>
+          </a:bodyPr>
           <a:lstStyle/>
           <a:p>
             <a:pPr algn="l"/>
@@ -9092,7 +9264,9 @@
           <a:noFill/>
         </p:spPr>
         <p:txBody>
-          <a:bodyPr wrap="square"/>
+          <a:bodyPr wrap="square">
+            <a:normAutofit/>
+          </a:bodyPr>
           <a:lstStyle/>
           <a:p>
             <a:pPr algn="l"/>
@@ -9125,7 +9299,9 @@
           <a:noFill/>
         </p:spPr>
         <p:txBody>
-          <a:bodyPr wrap="square"/>
+          <a:bodyPr wrap="square">
+            <a:normAutofit/>
+          </a:bodyPr>
           <a:lstStyle/>
           <a:p>
             <a:pPr algn="l"/>
@@ -9203,7 +9379,9 @@
           <a:noFill/>
         </p:spPr>
         <p:txBody>
-          <a:bodyPr wrap="square"/>
+          <a:bodyPr wrap="square">
+            <a:normAutofit/>
+          </a:bodyPr>
           <a:lstStyle/>
           <a:p>
             <a:pPr algn="l"/>
@@ -9281,7 +9459,9 @@
           <a:noFill/>
         </p:spPr>
         <p:txBody>
-          <a:bodyPr wrap="square"/>
+          <a:bodyPr wrap="square">
+            <a:normAutofit/>
+          </a:bodyPr>
           <a:lstStyle/>
           <a:p>
             <a:pPr algn="l"/>
@@ -9314,7 +9494,9 @@
           <a:noFill/>
         </p:spPr>
         <p:txBody>
-          <a:bodyPr wrap="square"/>
+          <a:bodyPr wrap="square">
+            <a:normAutofit/>
+          </a:bodyPr>
           <a:lstStyle/>
           <a:p>
             <a:pPr algn="l"/>
@@ -9347,7 +9529,9 @@
           <a:noFill/>
         </p:spPr>
         <p:txBody>
-          <a:bodyPr wrap="square"/>
+          <a:bodyPr wrap="square">
+            <a:normAutofit/>
+          </a:bodyPr>
           <a:lstStyle/>
           <a:p>
             <a:pPr algn="l"/>
@@ -9425,7 +9609,9 @@
           <a:noFill/>
         </p:spPr>
         <p:txBody>
-          <a:bodyPr wrap="square"/>
+          <a:bodyPr wrap="square">
+            <a:normAutofit/>
+          </a:bodyPr>
           <a:lstStyle/>
           <a:p>
             <a:pPr algn="l"/>
@@ -9458,7 +9644,9 @@
           <a:noFill/>
         </p:spPr>
         <p:txBody>
-          <a:bodyPr wrap="square"/>
+          <a:bodyPr wrap="square">
+            <a:normAutofit/>
+          </a:bodyPr>
           <a:lstStyle/>
           <a:p>
             <a:pPr algn="l"/>
@@ -9491,7 +9679,9 @@
           <a:noFill/>
         </p:spPr>
         <p:txBody>
-          <a:bodyPr wrap="square"/>
+          <a:bodyPr wrap="square">
+            <a:normAutofit/>
+          </a:bodyPr>
           <a:lstStyle/>
           <a:p>
             <a:pPr algn="l"/>
@@ -9524,7 +9714,9 @@
           <a:noFill/>
         </p:spPr>
         <p:txBody>
-          <a:bodyPr wrap="square"/>
+          <a:bodyPr wrap="square">
+            <a:normAutofit/>
+          </a:bodyPr>
           <a:lstStyle/>
           <a:p>
             <a:pPr algn="l"/>
@@ -9557,7 +9749,9 @@
           <a:noFill/>
         </p:spPr>
         <p:txBody>
-          <a:bodyPr wrap="square"/>
+          <a:bodyPr wrap="square">
+            <a:normAutofit/>
+          </a:bodyPr>
           <a:lstStyle/>
           <a:p>
             <a:pPr algn="l"/>
@@ -9635,7 +9829,9 @@
           <a:noFill/>
         </p:spPr>
         <p:txBody>
-          <a:bodyPr wrap="square"/>
+          <a:bodyPr wrap="square">
+            <a:normAutofit/>
+          </a:bodyPr>
           <a:lstStyle/>
           <a:p>
             <a:pPr algn="l"/>
@@ -9668,7 +9864,9 @@
           <a:noFill/>
         </p:spPr>
         <p:txBody>
-          <a:bodyPr wrap="square"/>
+          <a:bodyPr wrap="square">
+            <a:normAutofit/>
+          </a:bodyPr>
           <a:lstStyle/>
           <a:p>
             <a:pPr algn="l"/>
@@ -9746,7 +9944,9 @@
           <a:noFill/>
         </p:spPr>
         <p:txBody>
-          <a:bodyPr wrap="square"/>
+          <a:bodyPr wrap="square">
+            <a:normAutofit/>
+          </a:bodyPr>
           <a:lstStyle/>
           <a:p>
             <a:pPr algn="l"/>
@@ -9779,7 +9979,9 @@
           <a:noFill/>
         </p:spPr>
         <p:txBody>
-          <a:bodyPr wrap="square"/>
+          <a:bodyPr wrap="square">
+            <a:normAutofit/>
+          </a:bodyPr>
           <a:lstStyle/>
           <a:p>
             <a:pPr algn="l"/>
@@ -9857,7 +10059,9 @@
           <a:noFill/>
         </p:spPr>
         <p:txBody>
-          <a:bodyPr wrap="square"/>
+          <a:bodyPr wrap="square">
+            <a:normAutofit/>
+          </a:bodyPr>
           <a:lstStyle/>
           <a:p>
             <a:pPr algn="l"/>
@@ -9890,7 +10094,9 @@
           <a:noFill/>
         </p:spPr>
         <p:txBody>
-          <a:bodyPr wrap="square"/>
+          <a:bodyPr wrap="square">
+            <a:normAutofit/>
+          </a:bodyPr>
           <a:lstStyle/>
           <a:p>
             <a:pPr algn="l"/>
@@ -9968,7 +10174,9 @@
           <a:noFill/>
         </p:spPr>
         <p:txBody>
-          <a:bodyPr wrap="square"/>
+          <a:bodyPr wrap="square">
+            <a:normAutofit/>
+          </a:bodyPr>
           <a:lstStyle/>
           <a:p>
             <a:pPr algn="l"/>
@@ -10001,7 +10209,9 @@
           <a:noFill/>
         </p:spPr>
         <p:txBody>
-          <a:bodyPr wrap="square"/>
+          <a:bodyPr wrap="square">
+            <a:normAutofit/>
+          </a:bodyPr>
           <a:lstStyle/>
           <a:p>
             <a:pPr algn="l"/>
@@ -10079,7 +10289,9 @@
           <a:noFill/>
         </p:spPr>
         <p:txBody>
-          <a:bodyPr wrap="square"/>
+          <a:bodyPr wrap="square">
+            <a:normAutofit/>
+          </a:bodyPr>
           <a:lstStyle/>
           <a:p>
             <a:pPr algn="l"/>
@@ -10112,7 +10324,9 @@
           <a:noFill/>
         </p:spPr>
         <p:txBody>
-          <a:bodyPr wrap="square"/>
+          <a:bodyPr wrap="square">
+            <a:normAutofit/>
+          </a:bodyPr>
           <a:lstStyle/>
           <a:p>
             <a:pPr algn="l"/>
@@ -10190,7 +10404,9 @@
           <a:noFill/>
         </p:spPr>
         <p:txBody>
-          <a:bodyPr wrap="square"/>
+          <a:bodyPr wrap="square">
+            <a:normAutofit/>
+          </a:bodyPr>
           <a:lstStyle/>
           <a:p>
             <a:pPr algn="ctr"/>
@@ -10292,7 +10508,9 @@
           <a:noFill/>
         </p:spPr>
         <p:txBody>
-          <a:bodyPr wrap="square"/>
+          <a:bodyPr wrap="square">
+            <a:normAutofit/>
+          </a:bodyPr>
           <a:lstStyle/>
           <a:p>
             <a:pPr algn="l"/>
@@ -10325,7 +10543,9 @@
           <a:noFill/>
         </p:spPr>
         <p:txBody>
-          <a:bodyPr wrap="square"/>
+          <a:bodyPr wrap="square">
+            <a:normAutofit/>
+          </a:bodyPr>
           <a:lstStyle/>
           <a:p>
             <a:pPr algn="r"/>

--- a/hernandez-law/Hernandez_Law_August 14, 2026_Proposal.pptx
+++ b/hernandez-law/Hernandez_Law_August 14, 2026_Proposal.pptx
@@ -5533,7 +5533,7 @@
             <a:avLst/>
           </a:prstGeom>
           <a:solidFill>
-            <a:srgbClr val="FFF0F0"/>
+            <a:srgbClr val="E3F4FA"/>
           </a:solidFill>
           <a:ln>
             <a:solidFill>
@@ -5578,7 +5578,7 @@
             <a:avLst/>
           </a:prstGeom>
           <a:solidFill>
-            <a:srgbClr val="C0392B"/>
+            <a:srgbClr val="0091C9"/>
           </a:solidFill>
           <a:ln>
             <a:solidFill>
@@ -5634,7 +5634,7 @@
             <a:r>
               <a:rPr sz="900" b="1" i="0">
                 <a:solidFill>
-                  <a:srgbClr val="C0392B"/>
+                  <a:srgbClr val="003A59"/>
                 </a:solidFill>
                 <a:latin typeface="Poppins"/>
               </a:rPr>
@@ -5669,7 +5669,7 @@
             <a:r>
               <a:rPr sz="800" b="1" i="0">
                 <a:solidFill>
-                  <a:srgbClr val="C0392B"/>
+                  <a:srgbClr val="0091C9"/>
                 </a:solidFill>
                 <a:latin typeface="Poppins"/>
               </a:rPr>

--- a/hernandez-law/Hernandez_Law_August 14, 2026_Proposal.pptx
+++ b/hernandez-law/Hernandez_Law_August 14, 2026_Proposal.pptx
@@ -1,6 +1,6 @@
 
 <file path=ppt/presentation.xml><?xml version="1.0" encoding="utf-8"?>
-<p:presentation xmlns:a="http://schemas.openxmlformats.org/drawingml/2006/main" xmlns:r="http://schemas.openxmlformats.org/officeDocument/2006/relationships" xmlns:p="http://schemas.openxmlformats.org/presentationml/2006/main" saveSubsetFonts="1" autoCompressPictures="0">
+<p:presentation xmlns:a="http://schemas.openxmlformats.org/drawingml/2006/main" xmlns:r="http://schemas.openxmlformats.org/officeDocument/2006/relationships" xmlns:p="http://schemas.openxmlformats.org/presentationml/2006/main" saveSubsetFonts="1" autoCompressPictures="0" embedTrueTypeFonts="1">
   <p:sldMasterIdLst>
     <p:sldMasterId id="2147483648" r:id="rId1"/>
   </p:sldMasterIdLst>
@@ -11,6 +11,14 @@
   </p:sldIdLst>
   <p:sldSz cx="9144000" cy="5143500" type="screen4x3"/>
   <p:notesSz cx="6858000" cy="9144000"/>
+  <p:embeddedFontLst>
+    <p:embeddedFont>
+      <p:font typeface="Poppins"/>
+      <p:regular r:id="rIdEmbedFont1"/>
+      <p:bold r:id="rIdEmbedFont2"/>
+      <p:italic r:id="rIdEmbedFont3"/>
+    </p:embeddedFont>
+  </p:embeddedFontLst>
   <p:defaultTextStyle>
     <a:defPPr>
       <a:defRPr lang="en-US"/>
@@ -3152,7 +3160,9 @@
           <a:noFill/>
         </p:spPr>
         <p:txBody>
-          <a:bodyPr wrap="square"/>
+          <a:bodyPr wrap="square">
+            <a:normAutofit/>
+          </a:bodyPr>
           <a:lstStyle/>
           <a:p>
             <a:pPr algn="l"/>
@@ -3185,7 +3195,9 @@
           <a:noFill/>
         </p:spPr>
         <p:txBody>
-          <a:bodyPr wrap="square"/>
+          <a:bodyPr wrap="square">
+            <a:normAutofit/>
+          </a:bodyPr>
           <a:lstStyle/>
           <a:p>
             <a:pPr algn="l"/>
@@ -3308,7 +3320,9 @@
           <a:noFill/>
         </p:spPr>
         <p:txBody>
-          <a:bodyPr wrap="square"/>
+          <a:bodyPr wrap="square">
+            <a:normAutofit/>
+          </a:bodyPr>
           <a:lstStyle/>
           <a:p>
             <a:pPr algn="ctr"/>
@@ -3341,7 +3355,9 @@
           <a:noFill/>
         </p:spPr>
         <p:txBody>
-          <a:bodyPr wrap="square"/>
+          <a:bodyPr wrap="square">
+            <a:normAutofit/>
+          </a:bodyPr>
           <a:lstStyle/>
           <a:p>
             <a:pPr algn="ctr"/>
@@ -3464,7 +3480,9 @@
           <a:noFill/>
         </p:spPr>
         <p:txBody>
-          <a:bodyPr wrap="square"/>
+          <a:bodyPr wrap="square">
+            <a:normAutofit/>
+          </a:bodyPr>
           <a:lstStyle/>
           <a:p>
             <a:pPr algn="l"/>
@@ -3497,7 +3515,9 @@
           <a:noFill/>
         </p:spPr>
         <p:txBody>
-          <a:bodyPr wrap="square"/>
+          <a:bodyPr wrap="square">
+            <a:normAutofit/>
+          </a:bodyPr>
           <a:lstStyle/>
           <a:p>
             <a:pPr algn="l"/>
@@ -3530,7 +3550,9 @@
           <a:noFill/>
         </p:spPr>
         <p:txBody>
-          <a:bodyPr wrap="square"/>
+          <a:bodyPr wrap="square">
+            <a:normAutofit/>
+          </a:bodyPr>
           <a:lstStyle/>
           <a:p>
             <a:pPr algn="l"/>
@@ -3653,7 +3675,9 @@
           <a:noFill/>
         </p:spPr>
         <p:txBody>
-          <a:bodyPr wrap="square"/>
+          <a:bodyPr wrap="square">
+            <a:normAutofit/>
+          </a:bodyPr>
           <a:lstStyle/>
           <a:p>
             <a:pPr algn="l"/>
@@ -3686,7 +3710,9 @@
           <a:noFill/>
         </p:spPr>
         <p:txBody>
-          <a:bodyPr wrap="square"/>
+          <a:bodyPr wrap="square">
+            <a:normAutofit/>
+          </a:bodyPr>
           <a:lstStyle/>
           <a:p>
             <a:pPr algn="l"/>
@@ -3719,7 +3745,9 @@
           <a:noFill/>
         </p:spPr>
         <p:txBody>
-          <a:bodyPr wrap="square"/>
+          <a:bodyPr wrap="square">
+            <a:normAutofit/>
+          </a:bodyPr>
           <a:lstStyle/>
           <a:p>
             <a:pPr algn="l"/>
@@ -3842,7 +3870,9 @@
           <a:noFill/>
         </p:spPr>
         <p:txBody>
-          <a:bodyPr wrap="square"/>
+          <a:bodyPr wrap="square">
+            <a:normAutofit/>
+          </a:bodyPr>
           <a:lstStyle/>
           <a:p>
             <a:pPr algn="l"/>
@@ -3875,7 +3905,9 @@
           <a:noFill/>
         </p:spPr>
         <p:txBody>
-          <a:bodyPr wrap="square"/>
+          <a:bodyPr wrap="square">
+            <a:normAutofit/>
+          </a:bodyPr>
           <a:lstStyle/>
           <a:p>
             <a:pPr algn="l"/>
@@ -3908,7 +3940,9 @@
           <a:noFill/>
         </p:spPr>
         <p:txBody>
-          <a:bodyPr wrap="square"/>
+          <a:bodyPr wrap="square">
+            <a:normAutofit/>
+          </a:bodyPr>
           <a:lstStyle/>
           <a:p>
             <a:pPr algn="l"/>
@@ -4031,7 +4065,9 @@
           <a:noFill/>
         </p:spPr>
         <p:txBody>
-          <a:bodyPr wrap="square"/>
+          <a:bodyPr wrap="square">
+            <a:normAutofit/>
+          </a:bodyPr>
           <a:lstStyle/>
           <a:p>
             <a:pPr algn="l"/>
@@ -4064,7 +4100,9 @@
           <a:noFill/>
         </p:spPr>
         <p:txBody>
-          <a:bodyPr wrap="square"/>
+          <a:bodyPr wrap="square">
+            <a:normAutofit/>
+          </a:bodyPr>
           <a:lstStyle/>
           <a:p>
             <a:pPr algn="l"/>
@@ -4097,7 +4135,9 @@
           <a:noFill/>
         </p:spPr>
         <p:txBody>
-          <a:bodyPr wrap="square"/>
+          <a:bodyPr wrap="square">
+            <a:normAutofit/>
+          </a:bodyPr>
           <a:lstStyle/>
           <a:p>
             <a:pPr algn="l"/>
@@ -4130,7 +4170,9 @@
           <a:noFill/>
         </p:spPr>
         <p:txBody>
-          <a:bodyPr wrap="square"/>
+          <a:bodyPr wrap="square">
+            <a:normAutofit/>
+          </a:bodyPr>
           <a:lstStyle/>
           <a:p>
             <a:pPr algn="l"/>
@@ -4253,7 +4295,9 @@
           <a:noFill/>
         </p:spPr>
         <p:txBody>
-          <a:bodyPr wrap="square"/>
+          <a:bodyPr wrap="square">
+            <a:normAutofit/>
+          </a:bodyPr>
           <a:lstStyle/>
           <a:p>
             <a:pPr algn="ctr"/>
@@ -4278,7 +4322,7 @@
         <p:spPr>
           <a:xfrm>
             <a:off x="676656" y="2286000"/>
-            <a:ext cx="4352544" cy="420624"/>
+            <a:ext cx="4352544" cy="475488"/>
           </a:xfrm>
           <a:prstGeom prst="rect">
             <a:avLst/>
@@ -4286,7 +4330,9 @@
           <a:noFill/>
         </p:spPr>
         <p:txBody>
-          <a:bodyPr wrap="square"/>
+          <a:bodyPr wrap="square">
+            <a:normAutofit/>
+          </a:bodyPr>
           <a:lstStyle/>
           <a:p>
             <a:pPr algn="l"/>
@@ -4409,7 +4455,9 @@
           <a:noFill/>
         </p:spPr>
         <p:txBody>
-          <a:bodyPr wrap="square"/>
+          <a:bodyPr wrap="square">
+            <a:normAutofit/>
+          </a:bodyPr>
           <a:lstStyle/>
           <a:p>
             <a:pPr algn="ctr"/>
@@ -4434,7 +4482,7 @@
         <p:spPr>
           <a:xfrm>
             <a:off x="676656" y="2907792"/>
-            <a:ext cx="4352544" cy="420624"/>
+            <a:ext cx="4352544" cy="475488"/>
           </a:xfrm>
           <a:prstGeom prst="rect">
             <a:avLst/>
@@ -4442,7 +4490,9 @@
           <a:noFill/>
         </p:spPr>
         <p:txBody>
-          <a:bodyPr wrap="square"/>
+          <a:bodyPr wrap="square">
+            <a:normAutofit/>
+          </a:bodyPr>
           <a:lstStyle/>
           <a:p>
             <a:pPr algn="l"/>
@@ -4565,7 +4615,9 @@
           <a:noFill/>
         </p:spPr>
         <p:txBody>
-          <a:bodyPr wrap="square"/>
+          <a:bodyPr wrap="square">
+            <a:normAutofit/>
+          </a:bodyPr>
           <a:lstStyle/>
           <a:p>
             <a:pPr algn="ctr"/>
@@ -4590,7 +4642,7 @@
         <p:spPr>
           <a:xfrm>
             <a:off x="676656" y="3529584"/>
-            <a:ext cx="4352544" cy="420624"/>
+            <a:ext cx="4352544" cy="475488"/>
           </a:xfrm>
           <a:prstGeom prst="rect">
             <a:avLst/>
@@ -4598,7 +4650,9 @@
           <a:noFill/>
         </p:spPr>
         <p:txBody>
-          <a:bodyPr wrap="square"/>
+          <a:bodyPr wrap="square">
+            <a:normAutofit/>
+          </a:bodyPr>
           <a:lstStyle/>
           <a:p>
             <a:pPr algn="l"/>
@@ -4721,7 +4775,9 @@
           <a:noFill/>
         </p:spPr>
         <p:txBody>
-          <a:bodyPr wrap="square"/>
+          <a:bodyPr wrap="square">
+            <a:normAutofit/>
+          </a:bodyPr>
           <a:lstStyle/>
           <a:p>
             <a:pPr algn="ctr"/>
@@ -4746,7 +4802,7 @@
         <p:spPr>
           <a:xfrm>
             <a:off x="676656" y="4151376"/>
-            <a:ext cx="4352544" cy="420624"/>
+            <a:ext cx="4352544" cy="475488"/>
           </a:xfrm>
           <a:prstGeom prst="rect">
             <a:avLst/>
@@ -4754,7 +4810,9 @@
           <a:noFill/>
         </p:spPr>
         <p:txBody>
-          <a:bodyPr wrap="square"/>
+          <a:bodyPr wrap="square">
+            <a:normAutofit/>
+          </a:bodyPr>
           <a:lstStyle/>
           <a:p>
             <a:pPr algn="l"/>
@@ -4922,7 +4980,9 @@
           <a:noFill/>
         </p:spPr>
         <p:txBody>
-          <a:bodyPr wrap="square"/>
+          <a:bodyPr wrap="square">
+            <a:normAutofit/>
+          </a:bodyPr>
           <a:lstStyle/>
           <a:p>
             <a:pPr algn="l"/>
@@ -4955,7 +5015,9 @@
           <a:noFill/>
         </p:spPr>
         <p:txBody>
-          <a:bodyPr wrap="square"/>
+          <a:bodyPr wrap="square">
+            <a:normAutofit/>
+          </a:bodyPr>
           <a:lstStyle/>
           <a:p>
             <a:pPr algn="l"/>
@@ -4988,7 +5050,9 @@
           <a:noFill/>
         </p:spPr>
         <p:txBody>
-          <a:bodyPr wrap="square"/>
+          <a:bodyPr wrap="square">
+            <a:normAutofit/>
+          </a:bodyPr>
           <a:lstStyle/>
           <a:p>
             <a:pPr algn="l"/>
@@ -5058,7 +5122,7 @@
         <p:spPr>
           <a:xfrm>
             <a:off x="5413248" y="2221991"/>
-            <a:ext cx="1828800" cy="219456"/>
+            <a:ext cx="1828800" cy="256032"/>
           </a:xfrm>
           <a:prstGeom prst="rect">
             <a:avLst/>
@@ -5066,7 +5130,9 @@
           <a:noFill/>
         </p:spPr>
         <p:txBody>
-          <a:bodyPr wrap="square"/>
+          <a:bodyPr wrap="square">
+            <a:normAutofit/>
+          </a:bodyPr>
           <a:lstStyle/>
           <a:p>
             <a:pPr algn="l"/>
@@ -5091,7 +5157,7 @@
         <p:spPr>
           <a:xfrm>
             <a:off x="7260336" y="2221991"/>
-            <a:ext cx="914400" cy="219456"/>
+            <a:ext cx="914400" cy="256032"/>
           </a:xfrm>
           <a:prstGeom prst="rect">
             <a:avLst/>
@@ -5099,7 +5165,9 @@
           <a:noFill/>
         </p:spPr>
         <p:txBody>
-          <a:bodyPr wrap="square"/>
+          <a:bodyPr wrap="square">
+            <a:normAutofit/>
+          </a:bodyPr>
           <a:lstStyle/>
           <a:p>
             <a:pPr algn="l"/>
@@ -5124,7 +5192,7 @@
         <p:spPr>
           <a:xfrm>
             <a:off x="8193024" y="2240279"/>
-            <a:ext cx="822960" cy="201168"/>
+            <a:ext cx="822960" cy="237744"/>
           </a:xfrm>
           <a:prstGeom prst="rect">
             <a:avLst/>
@@ -5132,7 +5200,9 @@
           <a:noFill/>
         </p:spPr>
         <p:txBody>
-          <a:bodyPr wrap="square"/>
+          <a:bodyPr wrap="square">
+            <a:normAutofit/>
+          </a:bodyPr>
           <a:lstStyle/>
           <a:p>
             <a:pPr algn="l"/>
@@ -5202,7 +5272,7 @@
         <p:spPr>
           <a:xfrm>
             <a:off x="5413248" y="2569463"/>
-            <a:ext cx="1828800" cy="219456"/>
+            <a:ext cx="1828800" cy="256032"/>
           </a:xfrm>
           <a:prstGeom prst="rect">
             <a:avLst/>
@@ -5210,7 +5280,9 @@
           <a:noFill/>
         </p:spPr>
         <p:txBody>
-          <a:bodyPr wrap="square"/>
+          <a:bodyPr wrap="square">
+            <a:normAutofit/>
+          </a:bodyPr>
           <a:lstStyle/>
           <a:p>
             <a:pPr algn="l"/>
@@ -5235,7 +5307,7 @@
         <p:spPr>
           <a:xfrm>
             <a:off x="7260336" y="2569463"/>
-            <a:ext cx="914400" cy="219456"/>
+            <a:ext cx="914400" cy="256032"/>
           </a:xfrm>
           <a:prstGeom prst="rect">
             <a:avLst/>
@@ -5243,7 +5315,9 @@
           <a:noFill/>
         </p:spPr>
         <p:txBody>
-          <a:bodyPr wrap="square"/>
+          <a:bodyPr wrap="square">
+            <a:normAutofit/>
+          </a:bodyPr>
           <a:lstStyle/>
           <a:p>
             <a:pPr algn="l"/>
@@ -5268,7 +5342,7 @@
         <p:spPr>
           <a:xfrm>
             <a:off x="8193024" y="2587751"/>
-            <a:ext cx="822960" cy="201168"/>
+            <a:ext cx="822960" cy="237744"/>
           </a:xfrm>
           <a:prstGeom prst="rect">
             <a:avLst/>
@@ -5276,7 +5350,9 @@
           <a:noFill/>
         </p:spPr>
         <p:txBody>
-          <a:bodyPr wrap="square"/>
+          <a:bodyPr wrap="square">
+            <a:normAutofit/>
+          </a:bodyPr>
           <a:lstStyle/>
           <a:p>
             <a:pPr algn="l"/>
@@ -5346,7 +5422,7 @@
         <p:spPr>
           <a:xfrm>
             <a:off x="5413248" y="2916936"/>
-            <a:ext cx="1828800" cy="219456"/>
+            <a:ext cx="1828800" cy="256032"/>
           </a:xfrm>
           <a:prstGeom prst="rect">
             <a:avLst/>
@@ -5354,7 +5430,9 @@
           <a:noFill/>
         </p:spPr>
         <p:txBody>
-          <a:bodyPr wrap="square"/>
+          <a:bodyPr wrap="square">
+            <a:normAutofit/>
+          </a:bodyPr>
           <a:lstStyle/>
           <a:p>
             <a:pPr algn="l"/>
@@ -5379,7 +5457,7 @@
         <p:spPr>
           <a:xfrm>
             <a:off x="7260336" y="2916936"/>
-            <a:ext cx="914400" cy="219456"/>
+            <a:ext cx="914400" cy="256032"/>
           </a:xfrm>
           <a:prstGeom prst="rect">
             <a:avLst/>
@@ -5387,7 +5465,9 @@
           <a:noFill/>
         </p:spPr>
         <p:txBody>
-          <a:bodyPr wrap="square"/>
+          <a:bodyPr wrap="square">
+            <a:normAutofit/>
+          </a:bodyPr>
           <a:lstStyle/>
           <a:p>
             <a:pPr algn="l"/>
@@ -5412,7 +5492,7 @@
         <p:spPr>
           <a:xfrm>
             <a:off x="8193024" y="2935224"/>
-            <a:ext cx="822960" cy="201168"/>
+            <a:ext cx="822960" cy="237744"/>
           </a:xfrm>
           <a:prstGeom prst="rect">
             <a:avLst/>
@@ -5420,7 +5500,9 @@
           <a:noFill/>
         </p:spPr>
         <p:txBody>
-          <a:bodyPr wrap="square"/>
+          <a:bodyPr wrap="square">
+            <a:normAutofit/>
+          </a:bodyPr>
           <a:lstStyle/>
           <a:p>
             <a:pPr algn="l"/>
@@ -5451,7 +5533,7 @@
             <a:avLst/>
           </a:prstGeom>
           <a:solidFill>
-            <a:srgbClr val="FFF0F0"/>
+            <a:srgbClr val="E3F4FA"/>
           </a:solidFill>
           <a:ln>
             <a:solidFill>
@@ -5496,7 +5578,7 @@
             <a:avLst/>
           </a:prstGeom>
           <a:solidFill>
-            <a:srgbClr val="C0392B"/>
+            <a:srgbClr val="0091C9"/>
           </a:solidFill>
           <a:ln>
             <a:solidFill>
@@ -5535,7 +5617,7 @@
         <p:spPr>
           <a:xfrm>
             <a:off x="5413248" y="3264408"/>
-            <a:ext cx="1828800" cy="219456"/>
+            <a:ext cx="1828800" cy="256032"/>
           </a:xfrm>
           <a:prstGeom prst="rect">
             <a:avLst/>
@@ -5543,14 +5625,16 @@
           <a:noFill/>
         </p:spPr>
         <p:txBody>
-          <a:bodyPr wrap="square"/>
+          <a:bodyPr wrap="square">
+            <a:normAutofit/>
+          </a:bodyPr>
           <a:lstStyle/>
           <a:p>
             <a:pPr algn="l"/>
             <a:r>
               <a:rPr sz="900" b="1" i="0">
                 <a:solidFill>
-                  <a:srgbClr val="C0392B"/>
+                  <a:srgbClr val="003A59"/>
                 </a:solidFill>
                 <a:latin typeface="Poppins"/>
               </a:rPr>
@@ -5568,7 +5652,7 @@
         <p:spPr>
           <a:xfrm>
             <a:off x="7260336" y="3264408"/>
-            <a:ext cx="914400" cy="219456"/>
+            <a:ext cx="914400" cy="256032"/>
           </a:xfrm>
           <a:prstGeom prst="rect">
             <a:avLst/>
@@ -5576,14 +5660,16 @@
           <a:noFill/>
         </p:spPr>
         <p:txBody>
-          <a:bodyPr wrap="square"/>
+          <a:bodyPr wrap="square">
+            <a:normAutofit/>
+          </a:bodyPr>
           <a:lstStyle/>
           <a:p>
             <a:pPr algn="l"/>
             <a:r>
               <a:rPr sz="800" b="1" i="0">
                 <a:solidFill>
-                  <a:srgbClr val="C0392B"/>
+                  <a:srgbClr val="0091C9"/>
                 </a:solidFill>
                 <a:latin typeface="Poppins"/>
               </a:rPr>
@@ -5601,7 +5687,7 @@
         <p:spPr>
           <a:xfrm>
             <a:off x="8193024" y="3282696"/>
-            <a:ext cx="822960" cy="201168"/>
+            <a:ext cx="822960" cy="237744"/>
           </a:xfrm>
           <a:prstGeom prst="rect">
             <a:avLst/>
@@ -5609,7 +5695,9 @@
           <a:noFill/>
         </p:spPr>
         <p:txBody>
-          <a:bodyPr wrap="square"/>
+          <a:bodyPr wrap="square">
+            <a:normAutofit/>
+          </a:bodyPr>
           <a:lstStyle/>
           <a:p>
             <a:pPr algn="l"/>
@@ -5711,7 +5799,9 @@
           <a:noFill/>
         </p:spPr>
         <p:txBody>
-          <a:bodyPr wrap="square"/>
+          <a:bodyPr wrap="square">
+            <a:normAutofit/>
+          </a:bodyPr>
           <a:lstStyle/>
           <a:p>
             <a:pPr algn="l"/>
@@ -5744,7 +5834,9 @@
           <a:noFill/>
         </p:spPr>
         <p:txBody>
-          <a:bodyPr wrap="square"/>
+          <a:bodyPr wrap="square">
+            <a:normAutofit/>
+          </a:bodyPr>
           <a:lstStyle/>
           <a:p>
             <a:pPr algn="r"/>
@@ -5840,7 +5932,9 @@
           <a:noFill/>
         </p:spPr>
         <p:txBody>
-          <a:bodyPr wrap="square"/>
+          <a:bodyPr wrap="square">
+            <a:normAutofit/>
+          </a:bodyPr>
           <a:lstStyle/>
           <a:p>
             <a:pPr algn="l"/>
@@ -5873,7 +5967,9 @@
           <a:noFill/>
         </p:spPr>
         <p:txBody>
-          <a:bodyPr wrap="square"/>
+          <a:bodyPr wrap="square">
+            <a:normAutofit/>
+          </a:bodyPr>
           <a:lstStyle/>
           <a:p>
             <a:pPr algn="l"/>
@@ -5996,7 +6092,9 @@
           <a:noFill/>
         </p:spPr>
         <p:txBody>
-          <a:bodyPr wrap="square"/>
+          <a:bodyPr wrap="square">
+            <a:normAutofit/>
+          </a:bodyPr>
           <a:lstStyle/>
           <a:p>
             <a:pPr algn="l"/>
@@ -6029,7 +6127,9 @@
           <a:noFill/>
         </p:spPr>
         <p:txBody>
-          <a:bodyPr wrap="square"/>
+          <a:bodyPr wrap="square">
+            <a:normAutofit/>
+          </a:bodyPr>
           <a:lstStyle/>
           <a:p>
             <a:pPr algn="l"/>
@@ -6107,7 +6207,9 @@
           <a:noFill/>
         </p:spPr>
         <p:txBody>
-          <a:bodyPr wrap="square"/>
+          <a:bodyPr wrap="square">
+            <a:normAutofit/>
+          </a:bodyPr>
           <a:lstStyle/>
           <a:p>
             <a:pPr algn="l"/>
@@ -6140,7 +6242,9 @@
           <a:noFill/>
         </p:spPr>
         <p:txBody>
-          <a:bodyPr wrap="square"/>
+          <a:bodyPr wrap="square">
+            <a:normAutofit/>
+          </a:bodyPr>
           <a:lstStyle/>
           <a:p>
             <a:pPr algn="l"/>
@@ -6218,7 +6322,9 @@
           <a:noFill/>
         </p:spPr>
         <p:txBody>
-          <a:bodyPr wrap="square"/>
+          <a:bodyPr wrap="square">
+            <a:normAutofit/>
+          </a:bodyPr>
           <a:lstStyle/>
           <a:p>
             <a:pPr algn="l"/>
@@ -6251,7 +6357,9 @@
           <a:noFill/>
         </p:spPr>
         <p:txBody>
-          <a:bodyPr wrap="square"/>
+          <a:bodyPr wrap="square">
+            <a:normAutofit/>
+          </a:bodyPr>
           <a:lstStyle/>
           <a:p>
             <a:pPr algn="l"/>
@@ -6284,7 +6392,9 @@
           <a:noFill/>
         </p:spPr>
         <p:txBody>
-          <a:bodyPr wrap="square"/>
+          <a:bodyPr wrap="square">
+            <a:normAutofit/>
+          </a:bodyPr>
           <a:lstStyle/>
           <a:p>
             <a:pPr algn="l"/>
@@ -6407,7 +6517,9 @@
           <a:noFill/>
         </p:spPr>
         <p:txBody>
-          <a:bodyPr wrap="square"/>
+          <a:bodyPr wrap="square">
+            <a:normAutofit/>
+          </a:bodyPr>
           <a:lstStyle/>
           <a:p>
             <a:pPr algn="l"/>
@@ -6530,7 +6642,9 @@
           <a:noFill/>
         </p:spPr>
         <p:txBody>
-          <a:bodyPr wrap="square"/>
+          <a:bodyPr wrap="square">
+            <a:normAutofit/>
+          </a:bodyPr>
           <a:lstStyle/>
           <a:p>
             <a:pPr algn="l"/>
@@ -6653,7 +6767,9 @@
           <a:noFill/>
         </p:spPr>
         <p:txBody>
-          <a:bodyPr wrap="square"/>
+          <a:bodyPr wrap="square">
+            <a:normAutofit/>
+          </a:bodyPr>
           <a:lstStyle/>
           <a:p>
             <a:pPr algn="l"/>
@@ -6776,7 +6892,9 @@
           <a:noFill/>
         </p:spPr>
         <p:txBody>
-          <a:bodyPr wrap="square"/>
+          <a:bodyPr wrap="square">
+            <a:normAutofit/>
+          </a:bodyPr>
           <a:lstStyle/>
           <a:p>
             <a:pPr algn="l"/>
@@ -6899,7 +7017,9 @@
           <a:noFill/>
         </p:spPr>
         <p:txBody>
-          <a:bodyPr wrap="square"/>
+          <a:bodyPr wrap="square">
+            <a:normAutofit/>
+          </a:bodyPr>
           <a:lstStyle/>
           <a:p>
             <a:pPr algn="l"/>
@@ -6977,7 +7097,9 @@
           <a:noFill/>
         </p:spPr>
         <p:txBody>
-          <a:bodyPr wrap="square"/>
+          <a:bodyPr wrap="square">
+            <a:normAutofit/>
+          </a:bodyPr>
           <a:lstStyle/>
           <a:p>
             <a:pPr algn="l"/>
@@ -7010,7 +7132,9 @@
           <a:noFill/>
         </p:spPr>
         <p:txBody>
-          <a:bodyPr wrap="square"/>
+          <a:bodyPr wrap="square">
+            <a:normAutofit/>
+          </a:bodyPr>
           <a:lstStyle/>
           <a:p>
             <a:pPr algn="l"/>
@@ -7043,7 +7167,9 @@
           <a:noFill/>
         </p:spPr>
         <p:txBody>
-          <a:bodyPr wrap="square"/>
+          <a:bodyPr wrap="square">
+            <a:normAutofit/>
+          </a:bodyPr>
           <a:lstStyle/>
           <a:p>
             <a:pPr algn="l"/>
@@ -7166,7 +7292,9 @@
           <a:noFill/>
         </p:spPr>
         <p:txBody>
-          <a:bodyPr wrap="square"/>
+          <a:bodyPr wrap="square">
+            <a:normAutofit/>
+          </a:bodyPr>
           <a:lstStyle/>
           <a:p>
             <a:pPr algn="l"/>
@@ -7289,7 +7417,9 @@
           <a:noFill/>
         </p:spPr>
         <p:txBody>
-          <a:bodyPr wrap="square"/>
+          <a:bodyPr wrap="square">
+            <a:normAutofit/>
+          </a:bodyPr>
           <a:lstStyle/>
           <a:p>
             <a:pPr algn="l"/>
@@ -7412,7 +7542,9 @@
           <a:noFill/>
         </p:spPr>
         <p:txBody>
-          <a:bodyPr wrap="square"/>
+          <a:bodyPr wrap="square">
+            <a:normAutofit/>
+          </a:bodyPr>
           <a:lstStyle/>
           <a:p>
             <a:pPr algn="l"/>
@@ -7535,7 +7667,9 @@
           <a:noFill/>
         </p:spPr>
         <p:txBody>
-          <a:bodyPr wrap="square"/>
+          <a:bodyPr wrap="square">
+            <a:normAutofit/>
+          </a:bodyPr>
           <a:lstStyle/>
           <a:p>
             <a:pPr algn="l"/>
@@ -7658,7 +7792,9 @@
           <a:noFill/>
         </p:spPr>
         <p:txBody>
-          <a:bodyPr wrap="square"/>
+          <a:bodyPr wrap="square">
+            <a:normAutofit/>
+          </a:bodyPr>
           <a:lstStyle/>
           <a:p>
             <a:pPr algn="l"/>
@@ -7736,7 +7872,9 @@
           <a:noFill/>
         </p:spPr>
         <p:txBody>
-          <a:bodyPr wrap="square"/>
+          <a:bodyPr wrap="square">
+            <a:normAutofit/>
+          </a:bodyPr>
           <a:lstStyle/>
           <a:p>
             <a:pPr algn="l"/>
@@ -7769,7 +7907,9 @@
           <a:noFill/>
         </p:spPr>
         <p:txBody>
-          <a:bodyPr wrap="square"/>
+          <a:bodyPr wrap="square">
+            <a:normAutofit/>
+          </a:bodyPr>
           <a:lstStyle/>
           <a:p>
             <a:pPr algn="l"/>
@@ -7802,7 +7942,9 @@
           <a:noFill/>
         </p:spPr>
         <p:txBody>
-          <a:bodyPr wrap="square"/>
+          <a:bodyPr wrap="square">
+            <a:normAutofit/>
+          </a:bodyPr>
           <a:lstStyle/>
           <a:p>
             <a:pPr algn="l"/>
@@ -7925,7 +8067,9 @@
           <a:noFill/>
         </p:spPr>
         <p:txBody>
-          <a:bodyPr wrap="square"/>
+          <a:bodyPr wrap="square">
+            <a:normAutofit/>
+          </a:bodyPr>
           <a:lstStyle/>
           <a:p>
             <a:pPr algn="l"/>
@@ -8048,7 +8192,9 @@
           <a:noFill/>
         </p:spPr>
         <p:txBody>
-          <a:bodyPr wrap="square"/>
+          <a:bodyPr wrap="square">
+            <a:normAutofit/>
+          </a:bodyPr>
           <a:lstStyle/>
           <a:p>
             <a:pPr algn="l"/>
@@ -8171,7 +8317,9 @@
           <a:noFill/>
         </p:spPr>
         <p:txBody>
-          <a:bodyPr wrap="square"/>
+          <a:bodyPr wrap="square">
+            <a:normAutofit/>
+          </a:bodyPr>
           <a:lstStyle/>
           <a:p>
             <a:pPr algn="l"/>
@@ -8294,7 +8442,9 @@
           <a:noFill/>
         </p:spPr>
         <p:txBody>
-          <a:bodyPr wrap="square"/>
+          <a:bodyPr wrap="square">
+            <a:normAutofit/>
+          </a:bodyPr>
           <a:lstStyle/>
           <a:p>
             <a:pPr algn="l"/>
@@ -8417,7 +8567,9 @@
           <a:noFill/>
         </p:spPr>
         <p:txBody>
-          <a:bodyPr wrap="square"/>
+          <a:bodyPr wrap="square">
+            <a:normAutofit/>
+          </a:bodyPr>
           <a:lstStyle/>
           <a:p>
             <a:pPr algn="l"/>
@@ -8519,7 +8671,9 @@
           <a:noFill/>
         </p:spPr>
         <p:txBody>
-          <a:bodyPr wrap="square"/>
+          <a:bodyPr wrap="square">
+            <a:normAutofit/>
+          </a:bodyPr>
           <a:lstStyle/>
           <a:p>
             <a:pPr algn="l"/>
@@ -8552,7 +8706,9 @@
           <a:noFill/>
         </p:spPr>
         <p:txBody>
-          <a:bodyPr wrap="square"/>
+          <a:bodyPr wrap="square">
+            <a:normAutofit/>
+          </a:bodyPr>
           <a:lstStyle/>
           <a:p>
             <a:pPr algn="r"/>
@@ -8648,7 +8804,9 @@
           <a:noFill/>
         </p:spPr>
         <p:txBody>
-          <a:bodyPr wrap="square"/>
+          <a:bodyPr wrap="square">
+            <a:normAutofit/>
+          </a:bodyPr>
           <a:lstStyle/>
           <a:p>
             <a:pPr algn="l"/>
@@ -8681,7 +8839,9 @@
           <a:noFill/>
         </p:spPr>
         <p:txBody>
-          <a:bodyPr wrap="square"/>
+          <a:bodyPr wrap="square">
+            <a:normAutofit/>
+          </a:bodyPr>
           <a:lstStyle/>
           <a:p>
             <a:pPr algn="l"/>
@@ -8804,7 +8964,9 @@
           <a:noFill/>
         </p:spPr>
         <p:txBody>
-          <a:bodyPr wrap="square"/>
+          <a:bodyPr wrap="square">
+            <a:normAutofit/>
+          </a:bodyPr>
           <a:lstStyle/>
           <a:p>
             <a:pPr algn="l"/>
@@ -8837,7 +8999,9 @@
           <a:noFill/>
         </p:spPr>
         <p:txBody>
-          <a:bodyPr wrap="square"/>
+          <a:bodyPr wrap="square">
+            <a:normAutofit/>
+          </a:bodyPr>
           <a:lstStyle/>
           <a:p>
             <a:pPr algn="l"/>
@@ -8870,7 +9034,9 @@
           <a:noFill/>
         </p:spPr>
         <p:txBody>
-          <a:bodyPr wrap="square"/>
+          <a:bodyPr wrap="square">
+            <a:normAutofit/>
+          </a:bodyPr>
           <a:lstStyle/>
           <a:p>
             <a:pPr algn="l"/>
@@ -8903,7 +9069,9 @@
           <a:noFill/>
         </p:spPr>
         <p:txBody>
-          <a:bodyPr wrap="square"/>
+          <a:bodyPr wrap="square">
+            <a:normAutofit/>
+          </a:bodyPr>
           <a:lstStyle/>
           <a:p>
             <a:pPr algn="l"/>
@@ -8981,7 +9149,9 @@
           <a:noFill/>
         </p:spPr>
         <p:txBody>
-          <a:bodyPr wrap="square"/>
+          <a:bodyPr wrap="square">
+            <a:normAutofit/>
+          </a:bodyPr>
           <a:lstStyle/>
           <a:p>
             <a:pPr algn="l"/>
@@ -9059,7 +9229,9 @@
           <a:noFill/>
         </p:spPr>
         <p:txBody>
-          <a:bodyPr wrap="square"/>
+          <a:bodyPr wrap="square">
+            <a:normAutofit/>
+          </a:bodyPr>
           <a:lstStyle/>
           <a:p>
             <a:pPr algn="l"/>
@@ -9092,7 +9264,9 @@
           <a:noFill/>
         </p:spPr>
         <p:txBody>
-          <a:bodyPr wrap="square"/>
+          <a:bodyPr wrap="square">
+            <a:normAutofit/>
+          </a:bodyPr>
           <a:lstStyle/>
           <a:p>
             <a:pPr algn="l"/>
@@ -9125,7 +9299,9 @@
           <a:noFill/>
         </p:spPr>
         <p:txBody>
-          <a:bodyPr wrap="square"/>
+          <a:bodyPr wrap="square">
+            <a:normAutofit/>
+          </a:bodyPr>
           <a:lstStyle/>
           <a:p>
             <a:pPr algn="l"/>
@@ -9203,7 +9379,9 @@
           <a:noFill/>
         </p:spPr>
         <p:txBody>
-          <a:bodyPr wrap="square"/>
+          <a:bodyPr wrap="square">
+            <a:normAutofit/>
+          </a:bodyPr>
           <a:lstStyle/>
           <a:p>
             <a:pPr algn="l"/>
@@ -9281,7 +9459,9 @@
           <a:noFill/>
         </p:spPr>
         <p:txBody>
-          <a:bodyPr wrap="square"/>
+          <a:bodyPr wrap="square">
+            <a:normAutofit/>
+          </a:bodyPr>
           <a:lstStyle/>
           <a:p>
             <a:pPr algn="l"/>
@@ -9314,7 +9494,9 @@
           <a:noFill/>
         </p:spPr>
         <p:txBody>
-          <a:bodyPr wrap="square"/>
+          <a:bodyPr wrap="square">
+            <a:normAutofit/>
+          </a:bodyPr>
           <a:lstStyle/>
           <a:p>
             <a:pPr algn="l"/>
@@ -9347,7 +9529,9 @@
           <a:noFill/>
         </p:spPr>
         <p:txBody>
-          <a:bodyPr wrap="square"/>
+          <a:bodyPr wrap="square">
+            <a:normAutofit/>
+          </a:bodyPr>
           <a:lstStyle/>
           <a:p>
             <a:pPr algn="l"/>
@@ -9425,7 +9609,9 @@
           <a:noFill/>
         </p:spPr>
         <p:txBody>
-          <a:bodyPr wrap="square"/>
+          <a:bodyPr wrap="square">
+            <a:normAutofit/>
+          </a:bodyPr>
           <a:lstStyle/>
           <a:p>
             <a:pPr algn="l"/>
@@ -9458,7 +9644,9 @@
           <a:noFill/>
         </p:spPr>
         <p:txBody>
-          <a:bodyPr wrap="square"/>
+          <a:bodyPr wrap="square">
+            <a:normAutofit/>
+          </a:bodyPr>
           <a:lstStyle/>
           <a:p>
             <a:pPr algn="l"/>
@@ -9491,7 +9679,9 @@
           <a:noFill/>
         </p:spPr>
         <p:txBody>
-          <a:bodyPr wrap="square"/>
+          <a:bodyPr wrap="square">
+            <a:normAutofit/>
+          </a:bodyPr>
           <a:lstStyle/>
           <a:p>
             <a:pPr algn="l"/>
@@ -9524,7 +9714,9 @@
           <a:noFill/>
         </p:spPr>
         <p:txBody>
-          <a:bodyPr wrap="square"/>
+          <a:bodyPr wrap="square">
+            <a:normAutofit/>
+          </a:bodyPr>
           <a:lstStyle/>
           <a:p>
             <a:pPr algn="l"/>
@@ -9557,7 +9749,9 @@
           <a:noFill/>
         </p:spPr>
         <p:txBody>
-          <a:bodyPr wrap="square"/>
+          <a:bodyPr wrap="square">
+            <a:normAutofit/>
+          </a:bodyPr>
           <a:lstStyle/>
           <a:p>
             <a:pPr algn="l"/>
@@ -9635,7 +9829,9 @@
           <a:noFill/>
         </p:spPr>
         <p:txBody>
-          <a:bodyPr wrap="square"/>
+          <a:bodyPr wrap="square">
+            <a:normAutofit/>
+          </a:bodyPr>
           <a:lstStyle/>
           <a:p>
             <a:pPr algn="l"/>
@@ -9668,7 +9864,9 @@
           <a:noFill/>
         </p:spPr>
         <p:txBody>
-          <a:bodyPr wrap="square"/>
+          <a:bodyPr wrap="square">
+            <a:normAutofit/>
+          </a:bodyPr>
           <a:lstStyle/>
           <a:p>
             <a:pPr algn="l"/>
@@ -9746,7 +9944,9 @@
           <a:noFill/>
         </p:spPr>
         <p:txBody>
-          <a:bodyPr wrap="square"/>
+          <a:bodyPr wrap="square">
+            <a:normAutofit/>
+          </a:bodyPr>
           <a:lstStyle/>
           <a:p>
             <a:pPr algn="l"/>
@@ -9779,7 +9979,9 @@
           <a:noFill/>
         </p:spPr>
         <p:txBody>
-          <a:bodyPr wrap="square"/>
+          <a:bodyPr wrap="square">
+            <a:normAutofit/>
+          </a:bodyPr>
           <a:lstStyle/>
           <a:p>
             <a:pPr algn="l"/>
@@ -9857,7 +10059,9 @@
           <a:noFill/>
         </p:spPr>
         <p:txBody>
-          <a:bodyPr wrap="square"/>
+          <a:bodyPr wrap="square">
+            <a:normAutofit/>
+          </a:bodyPr>
           <a:lstStyle/>
           <a:p>
             <a:pPr algn="l"/>
@@ -9890,7 +10094,9 @@
           <a:noFill/>
         </p:spPr>
         <p:txBody>
-          <a:bodyPr wrap="square"/>
+          <a:bodyPr wrap="square">
+            <a:normAutofit/>
+          </a:bodyPr>
           <a:lstStyle/>
           <a:p>
             <a:pPr algn="l"/>
@@ -9968,7 +10174,9 @@
           <a:noFill/>
         </p:spPr>
         <p:txBody>
-          <a:bodyPr wrap="square"/>
+          <a:bodyPr wrap="square">
+            <a:normAutofit/>
+          </a:bodyPr>
           <a:lstStyle/>
           <a:p>
             <a:pPr algn="l"/>
@@ -10001,7 +10209,9 @@
           <a:noFill/>
         </p:spPr>
         <p:txBody>
-          <a:bodyPr wrap="square"/>
+          <a:bodyPr wrap="square">
+            <a:normAutofit/>
+          </a:bodyPr>
           <a:lstStyle/>
           <a:p>
             <a:pPr algn="l"/>
@@ -10079,7 +10289,9 @@
           <a:noFill/>
         </p:spPr>
         <p:txBody>
-          <a:bodyPr wrap="square"/>
+          <a:bodyPr wrap="square">
+            <a:normAutofit/>
+          </a:bodyPr>
           <a:lstStyle/>
           <a:p>
             <a:pPr algn="l"/>
@@ -10112,7 +10324,9 @@
           <a:noFill/>
         </p:spPr>
         <p:txBody>
-          <a:bodyPr wrap="square"/>
+          <a:bodyPr wrap="square">
+            <a:normAutofit/>
+          </a:bodyPr>
           <a:lstStyle/>
           <a:p>
             <a:pPr algn="l"/>
@@ -10190,7 +10404,9 @@
           <a:noFill/>
         </p:spPr>
         <p:txBody>
-          <a:bodyPr wrap="square"/>
+          <a:bodyPr wrap="square">
+            <a:normAutofit/>
+          </a:bodyPr>
           <a:lstStyle/>
           <a:p>
             <a:pPr algn="ctr"/>
@@ -10292,7 +10508,9 @@
           <a:noFill/>
         </p:spPr>
         <p:txBody>
-          <a:bodyPr wrap="square"/>
+          <a:bodyPr wrap="square">
+            <a:normAutofit/>
+          </a:bodyPr>
           <a:lstStyle/>
           <a:p>
             <a:pPr algn="l"/>
@@ -10325,7 +10543,9 @@
           <a:noFill/>
         </p:spPr>
         <p:txBody>
-          <a:bodyPr wrap="square"/>
+          <a:bodyPr wrap="square">
+            <a:normAutofit/>
+          </a:bodyPr>
           <a:lstStyle/>
           <a:p>
             <a:pPr algn="r"/>
